--- a/presentation/Projet Data Analytics – Telco Customer Churn.pptx
+++ b/presentation/Projet Data Analytics – Telco Customer Churn.pptx
@@ -5,20 +5,20 @@
     <p:sldMasterId id="2147483648" r:id="rId1"/>
   </p:sldMasterIdLst>
   <p:sldIdLst>
-    <p:sldId id="256" r:id="rId3"/>
-    <p:sldId id="257" r:id="rId4"/>
-    <p:sldId id="258" r:id="rId5"/>
-    <p:sldId id="259" r:id="rId6"/>
-    <p:sldId id="260" r:id="rId7"/>
-    <p:sldId id="261" r:id="rId8"/>
-    <p:sldId id="262" r:id="rId9"/>
-    <p:sldId id="263" r:id="rId10"/>
-    <p:sldId id="264" r:id="rId11"/>
-    <p:sldId id="265" r:id="rId12"/>
-    <p:sldId id="266" r:id="rId13"/>
-    <p:sldId id="267" r:id="rId14"/>
-    <p:sldId id="268" r:id="rId15"/>
-    <p:sldId id="269" r:id="rId16"/>
+    <p:sldId id="256" r:id="rId2"/>
+    <p:sldId id="257" r:id="rId3"/>
+    <p:sldId id="258" r:id="rId4"/>
+    <p:sldId id="259" r:id="rId5"/>
+    <p:sldId id="260" r:id="rId6"/>
+    <p:sldId id="261" r:id="rId7"/>
+    <p:sldId id="262" r:id="rId8"/>
+    <p:sldId id="263" r:id="rId9"/>
+    <p:sldId id="264" r:id="rId10"/>
+    <p:sldId id="265" r:id="rId11"/>
+    <p:sldId id="266" r:id="rId12"/>
+    <p:sldId id="267" r:id="rId13"/>
+    <p:sldId id="268" r:id="rId14"/>
+    <p:sldId id="269" r:id="rId15"/>
   </p:sldIdLst>
   <p:sldSz cx="12192000" cy="6858000"/>
   <p:notesSz cx="6858000" cy="9144000"/>
@@ -117,11 +117,16 @@
       </a:defRPr>
     </a:lvl9pPr>
   </p:defaultTextStyle>
+  <p:extLst>
+    <p:ext uri="{EFAFB233-063F-42B5-8137-9DF3F51BA10A}">
+      <p15:sldGuideLst xmlns:p15="http://schemas.microsoft.com/office/powerpoint/2012/main"/>
+    </p:ext>
+  </p:extLst>
 </p:presentation>
 </file>
 
 <file path=ppt/slideLayouts/slideLayout1.xml><?xml version="1.0" encoding="utf-8"?>
-<p:sldLayout xmlns:a="http://schemas.openxmlformats.org/drawingml/2006/main" xmlns:r="http://schemas.openxmlformats.org/officeDocument/2006/relationships" xmlns:p="http://schemas.openxmlformats.org/presentationml/2006/main" type="title" preserve="1" showMasterSp="0">
+<p:sldLayout xmlns:a="http://schemas.openxmlformats.org/drawingml/2006/main" xmlns:r="http://schemas.openxmlformats.org/officeDocument/2006/relationships" xmlns:p="http://schemas.openxmlformats.org/presentationml/2006/main" showMasterSp="0" type="title" preserve="1">
   <p:cSld name="Diapositive de titre">
     <p:spTree>
       <p:nvGrpSpPr>
@@ -272,6 +277,7 @@
           <a:p>
             <a:fld id="{67F45AC6-C491-4585-A584-9CE2AF7D5500}" type="datetime1">
               <a:rPr lang="en-US" smtClean="0"/>
+              <a:t>4/14/2026</a:t>
             </a:fld>
             <a:endParaRPr lang="en-US"/>
           </a:p>
@@ -313,6 +319,7 @@
           <a:p>
             <a:fld id="{CC057153-B650-4DEB-B370-79DDCFDCE934}" type="slidenum">
               <a:rPr lang="en-US" smtClean="0"/>
+              <a:t>‹N°›</a:t>
             </a:fld>
             <a:endParaRPr lang="en-US"/>
           </a:p>
@@ -460,7 +467,6 @@
               <a:rPr lang="fr-FR"/>
               <a:t>Cliquez pour modifier les styles du texte du masque</a:t>
             </a:r>
-            <a:endParaRPr lang="fr-FR"/>
           </a:p>
           <a:p>
             <a:pPr lvl="1"/>
@@ -468,7 +474,6 @@
               <a:rPr lang="fr-FR"/>
               <a:t>Deuxième niveau</a:t>
             </a:r>
-            <a:endParaRPr lang="fr-FR"/>
           </a:p>
           <a:p>
             <a:pPr lvl="2"/>
@@ -476,7 +481,6 @@
               <a:rPr lang="fr-FR"/>
               <a:t>Troisième niveau</a:t>
             </a:r>
-            <a:endParaRPr lang="fr-FR"/>
           </a:p>
           <a:p>
             <a:pPr lvl="3"/>
@@ -484,7 +488,6 @@
               <a:rPr lang="fr-FR"/>
               <a:t>Quatrième niveau</a:t>
             </a:r>
-            <a:endParaRPr lang="fr-FR"/>
           </a:p>
           <a:p>
             <a:pPr lvl="4"/>
@@ -513,6 +516,7 @@
           <a:p>
             <a:fld id="{67F45AC6-C491-4585-A584-9CE2AF7D5500}" type="datetime1">
               <a:rPr lang="en-US" smtClean="0"/>
+              <a:t>4/14/2026</a:t>
             </a:fld>
             <a:endParaRPr lang="en-US"/>
           </a:p>
@@ -554,6 +558,7 @@
           <a:p>
             <a:fld id="{CC057153-B650-4DEB-B370-79DDCFDCE934}" type="slidenum">
               <a:rPr lang="en-US" smtClean="0"/>
+              <a:t>‹N°›</a:t>
             </a:fld>
             <a:endParaRPr lang="en-US"/>
           </a:p>
@@ -569,7 +574,7 @@
 </file>
 
 <file path=ppt/slideLayouts/slideLayout11.xml><?xml version="1.0" encoding="utf-8"?>
-<p:sldLayout xmlns:a="http://schemas.openxmlformats.org/drawingml/2006/main" xmlns:r="http://schemas.openxmlformats.org/officeDocument/2006/relationships" xmlns:p="http://schemas.openxmlformats.org/presentationml/2006/main" type="vertTitleAndTx" preserve="1" showMasterSp="0">
+<p:sldLayout xmlns:a="http://schemas.openxmlformats.org/drawingml/2006/main" xmlns:r="http://schemas.openxmlformats.org/officeDocument/2006/relationships" xmlns:p="http://schemas.openxmlformats.org/presentationml/2006/main" showMasterSp="0" type="vertTitleAndTx" preserve="1">
   <p:cSld name="Titre vertical et texte">
     <p:spTree>
       <p:nvGrpSpPr>
@@ -638,7 +643,6 @@
               <a:rPr lang="fr-FR"/>
               <a:t>Cliquez pour modifier les styles du texte du masque</a:t>
             </a:r>
-            <a:endParaRPr lang="fr-FR"/>
           </a:p>
           <a:p>
             <a:pPr lvl="1"/>
@@ -646,7 +650,6 @@
               <a:rPr lang="fr-FR"/>
               <a:t>Deuxième niveau</a:t>
             </a:r>
-            <a:endParaRPr lang="fr-FR"/>
           </a:p>
           <a:p>
             <a:pPr lvl="2"/>
@@ -654,7 +657,6 @@
               <a:rPr lang="fr-FR"/>
               <a:t>Troisième niveau</a:t>
             </a:r>
-            <a:endParaRPr lang="fr-FR"/>
           </a:p>
           <a:p>
             <a:pPr lvl="3"/>
@@ -662,7 +664,6 @@
               <a:rPr lang="fr-FR"/>
               <a:t>Quatrième niveau</a:t>
             </a:r>
-            <a:endParaRPr lang="fr-FR"/>
           </a:p>
           <a:p>
             <a:pPr lvl="4"/>
@@ -691,6 +692,7 @@
           <a:p>
             <a:fld id="{67F45AC6-C491-4585-A584-9CE2AF7D5500}" type="datetime1">
               <a:rPr lang="en-US" smtClean="0"/>
+              <a:t>4/14/2026</a:t>
             </a:fld>
             <a:endParaRPr lang="en-US"/>
           </a:p>
@@ -732,6 +734,7 @@
           <a:p>
             <a:fld id="{CC057153-B650-4DEB-B370-79DDCFDCE934}" type="slidenum">
               <a:rPr lang="en-US" smtClean="0"/>
+              <a:t>‹N°›</a:t>
             </a:fld>
             <a:endParaRPr lang="en-US"/>
           </a:p>
@@ -841,7 +844,6 @@
               <a:rPr lang="fr-FR"/>
               <a:t>Cliquez pour modifier les styles du texte du masque</a:t>
             </a:r>
-            <a:endParaRPr lang="fr-FR"/>
           </a:p>
           <a:p>
             <a:pPr lvl="1"/>
@@ -849,7 +851,6 @@
               <a:rPr lang="fr-FR"/>
               <a:t>Deuxième niveau</a:t>
             </a:r>
-            <a:endParaRPr lang="fr-FR"/>
           </a:p>
           <a:p>
             <a:pPr lvl="2"/>
@@ -857,7 +858,6 @@
               <a:rPr lang="fr-FR"/>
               <a:t>Troisième niveau</a:t>
             </a:r>
-            <a:endParaRPr lang="fr-FR"/>
           </a:p>
           <a:p>
             <a:pPr lvl="3"/>
@@ -865,7 +865,6 @@
               <a:rPr lang="fr-FR"/>
               <a:t>Quatrième niveau</a:t>
             </a:r>
-            <a:endParaRPr lang="fr-FR"/>
           </a:p>
           <a:p>
             <a:pPr lvl="4"/>
@@ -894,6 +893,7 @@
           <a:p>
             <a:fld id="{67F45AC6-C491-4585-A584-9CE2AF7D5500}" type="datetime1">
               <a:rPr lang="en-US" smtClean="0"/>
+              <a:t>4/14/2026</a:t>
             </a:fld>
             <a:endParaRPr lang="en-US"/>
           </a:p>
@@ -935,6 +935,7 @@
           <a:p>
             <a:fld id="{CC057153-B650-4DEB-B370-79DDCFDCE934}" type="slidenum">
               <a:rPr lang="en-US" smtClean="0"/>
+              <a:t>‹N°›</a:t>
             </a:fld>
             <a:endParaRPr lang="en-US"/>
           </a:p>
@@ -950,7 +951,7 @@
 </file>
 
 <file path=ppt/slideLayouts/slideLayout3.xml><?xml version="1.0" encoding="utf-8"?>
-<p:sldLayout xmlns:a="http://schemas.openxmlformats.org/drawingml/2006/main" xmlns:r="http://schemas.openxmlformats.org/officeDocument/2006/relationships" xmlns:p="http://schemas.openxmlformats.org/presentationml/2006/main" type="secHead" preserve="1" showMasterSp="0">
+<p:sldLayout xmlns:a="http://schemas.openxmlformats.org/drawingml/2006/main" xmlns:r="http://schemas.openxmlformats.org/officeDocument/2006/relationships" xmlns:p="http://schemas.openxmlformats.org/presentationml/2006/main" showMasterSp="0" type="secHead" preserve="1">
   <p:cSld name="Titre de section">
     <p:spTree>
       <p:nvGrpSpPr>
@@ -1125,7 +1126,6 @@
               <a:rPr lang="fr-FR"/>
               <a:t>Cliquez pour modifier les styles du texte du masque</a:t>
             </a:r>
-            <a:endParaRPr lang="fr-FR"/>
           </a:p>
         </p:txBody>
       </p:sp>
@@ -1146,6 +1146,7 @@
           <a:p>
             <a:fld id="{67F45AC6-C491-4585-A584-9CE2AF7D5500}" type="datetime1">
               <a:rPr lang="en-US" smtClean="0"/>
+              <a:t>4/14/2026</a:t>
             </a:fld>
             <a:endParaRPr lang="en-US"/>
           </a:p>
@@ -1187,6 +1188,7 @@
           <a:p>
             <a:fld id="{CC057153-B650-4DEB-B370-79DDCFDCE934}" type="slidenum">
               <a:rPr lang="en-US" smtClean="0"/>
+              <a:t>‹N°›</a:t>
             </a:fld>
             <a:endParaRPr lang="en-US"/>
           </a:p>
@@ -1381,7 +1383,6 @@
               <a:rPr lang="fr-FR"/>
               <a:t>Cliquez pour modifier les styles du texte du masque</a:t>
             </a:r>
-            <a:endParaRPr lang="fr-FR"/>
           </a:p>
           <a:p>
             <a:pPr lvl="1"/>
@@ -1389,7 +1390,6 @@
               <a:rPr lang="fr-FR"/>
               <a:t>Deuxième niveau</a:t>
             </a:r>
-            <a:endParaRPr lang="fr-FR"/>
           </a:p>
           <a:p>
             <a:pPr lvl="2"/>
@@ -1397,7 +1397,6 @@
               <a:rPr lang="fr-FR"/>
               <a:t>Troisième niveau</a:t>
             </a:r>
-            <a:endParaRPr lang="fr-FR"/>
           </a:p>
           <a:p>
             <a:pPr lvl="3"/>
@@ -1405,7 +1404,6 @@
               <a:rPr lang="fr-FR"/>
               <a:t>Quatrième niveau</a:t>
             </a:r>
-            <a:endParaRPr lang="fr-FR"/>
           </a:p>
           <a:p>
             <a:pPr lvl="4"/>
@@ -1442,7 +1440,6 @@
               <a:rPr lang="fr-FR"/>
               <a:t>Cliquez pour modifier les styles du texte du masque</a:t>
             </a:r>
-            <a:endParaRPr lang="fr-FR"/>
           </a:p>
           <a:p>
             <a:pPr lvl="1"/>
@@ -1450,7 +1447,6 @@
               <a:rPr lang="fr-FR"/>
               <a:t>Deuxième niveau</a:t>
             </a:r>
-            <a:endParaRPr lang="fr-FR"/>
           </a:p>
           <a:p>
             <a:pPr lvl="2"/>
@@ -1458,7 +1454,6 @@
               <a:rPr lang="fr-FR"/>
               <a:t>Troisième niveau</a:t>
             </a:r>
-            <a:endParaRPr lang="fr-FR"/>
           </a:p>
           <a:p>
             <a:pPr lvl="3"/>
@@ -1466,7 +1461,6 @@
               <a:rPr lang="fr-FR"/>
               <a:t>Quatrième niveau</a:t>
             </a:r>
-            <a:endParaRPr lang="fr-FR"/>
           </a:p>
           <a:p>
             <a:pPr lvl="4"/>
@@ -1495,6 +1489,7 @@
           <a:p>
             <a:fld id="{67F45AC6-C491-4585-A584-9CE2AF7D5500}" type="datetime1">
               <a:rPr lang="en-US" smtClean="0"/>
+              <a:t>4/14/2026</a:t>
             </a:fld>
             <a:endParaRPr lang="en-US"/>
           </a:p>
@@ -1536,6 +1531,7 @@
           <a:p>
             <a:fld id="{CC057153-B650-4DEB-B370-79DDCFDCE934}" type="slidenum">
               <a:rPr lang="en-US" smtClean="0"/>
+              <a:t>‹N°›</a:t>
             </a:fld>
             <a:endParaRPr lang="en-US"/>
           </a:p>
@@ -1667,7 +1663,6 @@
               <a:rPr lang="fr-FR"/>
               <a:t>Cliquez pour modifier les styles du texte du masque</a:t>
             </a:r>
-            <a:endParaRPr lang="fr-FR"/>
           </a:p>
         </p:txBody>
       </p:sp>
@@ -1696,7 +1691,6 @@
               <a:rPr lang="fr-FR"/>
               <a:t>Cliquez pour modifier les styles du texte du masque</a:t>
             </a:r>
-            <a:endParaRPr lang="fr-FR"/>
           </a:p>
           <a:p>
             <a:pPr lvl="1"/>
@@ -1704,7 +1698,6 @@
               <a:rPr lang="fr-FR"/>
               <a:t>Deuxième niveau</a:t>
             </a:r>
-            <a:endParaRPr lang="fr-FR"/>
           </a:p>
           <a:p>
             <a:pPr lvl="2"/>
@@ -1712,7 +1705,6 @@
               <a:rPr lang="fr-FR"/>
               <a:t>Troisième niveau</a:t>
             </a:r>
-            <a:endParaRPr lang="fr-FR"/>
           </a:p>
           <a:p>
             <a:pPr lvl="3"/>
@@ -1720,7 +1712,6 @@
               <a:rPr lang="fr-FR"/>
               <a:t>Quatrième niveau</a:t>
             </a:r>
-            <a:endParaRPr lang="fr-FR"/>
           </a:p>
           <a:p>
             <a:pPr lvl="4"/>
@@ -1819,7 +1810,6 @@
               <a:rPr lang="fr-FR"/>
               <a:t>Cliquez pour modifier les styles du texte du masque</a:t>
             </a:r>
-            <a:endParaRPr lang="fr-FR"/>
           </a:p>
         </p:txBody>
       </p:sp>
@@ -1848,7 +1838,6 @@
               <a:rPr lang="fr-FR"/>
               <a:t>Cliquez pour modifier les styles du texte du masque</a:t>
             </a:r>
-            <a:endParaRPr lang="fr-FR"/>
           </a:p>
           <a:p>
             <a:pPr lvl="1"/>
@@ -1856,7 +1845,6 @@
               <a:rPr lang="fr-FR"/>
               <a:t>Deuxième niveau</a:t>
             </a:r>
-            <a:endParaRPr lang="fr-FR"/>
           </a:p>
           <a:p>
             <a:pPr lvl="2"/>
@@ -1864,7 +1852,6 @@
               <a:rPr lang="fr-FR"/>
               <a:t>Troisième niveau</a:t>
             </a:r>
-            <a:endParaRPr lang="fr-FR"/>
           </a:p>
           <a:p>
             <a:pPr lvl="3"/>
@@ -1872,7 +1859,6 @@
               <a:rPr lang="fr-FR"/>
               <a:t>Quatrième niveau</a:t>
             </a:r>
-            <a:endParaRPr lang="fr-FR"/>
           </a:p>
           <a:p>
             <a:pPr lvl="4"/>
@@ -1901,6 +1887,7 @@
           <a:p>
             <a:fld id="{67F45AC6-C491-4585-A584-9CE2AF7D5500}" type="datetime1">
               <a:rPr lang="en-US" smtClean="0"/>
+              <a:t>4/14/2026</a:t>
             </a:fld>
             <a:endParaRPr lang="en-US"/>
           </a:p>
@@ -1942,6 +1929,7 @@
           <a:p>
             <a:fld id="{CC057153-B650-4DEB-B370-79DDCFDCE934}" type="slidenum">
               <a:rPr lang="en-US" smtClean="0"/>
+              <a:t>‹N°›</a:t>
             </a:fld>
             <a:endParaRPr lang="en-US"/>
           </a:p>
@@ -2013,6 +2001,7 @@
           <a:p>
             <a:fld id="{67F45AC6-C491-4585-A584-9CE2AF7D5500}" type="datetime1">
               <a:rPr lang="en-US" smtClean="0"/>
+              <a:t>4/14/2026</a:t>
             </a:fld>
             <a:endParaRPr lang="en-US"/>
           </a:p>
@@ -2054,6 +2043,7 @@
           <a:p>
             <a:fld id="{CC057153-B650-4DEB-B370-79DDCFDCE934}" type="slidenum">
               <a:rPr lang="en-US" smtClean="0"/>
+              <a:t>‹N°›</a:t>
             </a:fld>
             <a:endParaRPr lang="en-US"/>
           </a:p>
@@ -2069,7 +2059,7 @@
 </file>
 
 <file path=ppt/slideLayouts/slideLayout7.xml><?xml version="1.0" encoding="utf-8"?>
-<p:sldLayout xmlns:a="http://schemas.openxmlformats.org/drawingml/2006/main" xmlns:r="http://schemas.openxmlformats.org/officeDocument/2006/relationships" xmlns:p="http://schemas.openxmlformats.org/presentationml/2006/main" type="blank" preserve="1" showMasterSp="0">
+<p:sldLayout xmlns:a="http://schemas.openxmlformats.org/drawingml/2006/main" xmlns:r="http://schemas.openxmlformats.org/officeDocument/2006/relationships" xmlns:p="http://schemas.openxmlformats.org/presentationml/2006/main" showMasterSp="0" type="blank" preserve="1">
   <p:cSld name="Vide">
     <p:spTree>
       <p:nvGrpSpPr>
@@ -2102,6 +2092,7 @@
           <a:p>
             <a:fld id="{67F45AC6-C491-4585-A584-9CE2AF7D5500}" type="datetime1">
               <a:rPr lang="en-US" smtClean="0"/>
+              <a:t>4/14/2026</a:t>
             </a:fld>
             <a:endParaRPr lang="en-US"/>
           </a:p>
@@ -2143,6 +2134,7 @@
           <a:p>
             <a:fld id="{CC057153-B650-4DEB-B370-79DDCFDCE934}" type="slidenum">
               <a:rPr lang="en-US" smtClean="0"/>
+              <a:t>‹N°›</a:t>
             </a:fld>
             <a:endParaRPr lang="en-US"/>
           </a:p>
@@ -2264,7 +2256,6 @@
               <a:rPr lang="fr-FR"/>
               <a:t>Cliquez pour modifier les styles du texte du masque</a:t>
             </a:r>
-            <a:endParaRPr lang="fr-FR"/>
           </a:p>
           <a:p>
             <a:pPr lvl="1"/>
@@ -2272,7 +2263,6 @@
               <a:rPr lang="fr-FR"/>
               <a:t>Deuxième niveau</a:t>
             </a:r>
-            <a:endParaRPr lang="fr-FR"/>
           </a:p>
           <a:p>
             <a:pPr lvl="2"/>
@@ -2280,7 +2270,6 @@
               <a:rPr lang="fr-FR"/>
               <a:t>Troisième niveau</a:t>
             </a:r>
-            <a:endParaRPr lang="fr-FR"/>
           </a:p>
           <a:p>
             <a:pPr lvl="3"/>
@@ -2288,7 +2277,6 @@
               <a:rPr lang="fr-FR"/>
               <a:t>Quatrième niveau</a:t>
             </a:r>
-            <a:endParaRPr lang="fr-FR"/>
           </a:p>
           <a:p>
             <a:pPr lvl="4"/>
@@ -2370,7 +2358,6 @@
               <a:rPr lang="fr-FR"/>
               <a:t>Cliquez pour modifier les styles du texte du masque</a:t>
             </a:r>
-            <a:endParaRPr lang="fr-FR"/>
           </a:p>
         </p:txBody>
       </p:sp>
@@ -2391,6 +2378,7 @@
           <a:p>
             <a:fld id="{67F45AC6-C491-4585-A584-9CE2AF7D5500}" type="datetime1">
               <a:rPr lang="en-US" smtClean="0"/>
+              <a:t>4/14/2026</a:t>
             </a:fld>
             <a:endParaRPr lang="en-US"/>
           </a:p>
@@ -2432,6 +2420,7 @@
           <a:p>
             <a:fld id="{CC057153-B650-4DEB-B370-79DDCFDCE934}" type="slidenum">
               <a:rPr lang="en-US" smtClean="0"/>
+              <a:t>‹N°›</a:t>
             </a:fld>
             <a:endParaRPr lang="en-US"/>
           </a:p>
@@ -2447,7 +2436,7 @@
 </file>
 
 <file path=ppt/slideLayouts/slideLayout9.xml><?xml version="1.0" encoding="utf-8"?>
-<p:sldLayout xmlns:a="http://schemas.openxmlformats.org/drawingml/2006/main" xmlns:r="http://schemas.openxmlformats.org/officeDocument/2006/relationships" xmlns:p="http://schemas.openxmlformats.org/presentationml/2006/main" type="picTx" preserve="1" showMasterSp="0">
+<p:sldLayout xmlns:a="http://schemas.openxmlformats.org/drawingml/2006/main" xmlns:r="http://schemas.openxmlformats.org/officeDocument/2006/relationships" xmlns:p="http://schemas.openxmlformats.org/presentationml/2006/main" showMasterSp="0" type="picTx" preserve="1">
   <p:cSld name="Image avec légende">
     <p:spTree>
       <p:nvGrpSpPr>
@@ -2645,7 +2634,6 @@
               <a:rPr lang="fr-FR"/>
               <a:t>Cliquez pour modifier les styles du texte du masque</a:t>
             </a:r>
-            <a:endParaRPr lang="fr-FR"/>
           </a:p>
         </p:txBody>
       </p:sp>
@@ -2666,6 +2654,7 @@
           <a:p>
             <a:fld id="{67F45AC6-C491-4585-A584-9CE2AF7D5500}" type="datetime1">
               <a:rPr lang="en-US" smtClean="0"/>
+              <a:t>4/14/2026</a:t>
             </a:fld>
             <a:endParaRPr lang="en-US"/>
           </a:p>
@@ -2707,6 +2696,7 @@
           <a:p>
             <a:fld id="{CC057153-B650-4DEB-B370-79DDCFDCE934}" type="slidenum">
               <a:rPr lang="en-US" smtClean="0"/>
+              <a:t>‹N°›</a:t>
             </a:fld>
             <a:endParaRPr lang="en-US"/>
           </a:p>
@@ -2841,7 +2831,6 @@
               <a:rPr lang="fr-FR"/>
               <a:t>Cliquez pour modifier les styles du texte du masque</a:t>
             </a:r>
-            <a:endParaRPr lang="fr-FR"/>
           </a:p>
           <a:p>
             <a:pPr lvl="1"/>
@@ -2849,7 +2838,6 @@
               <a:rPr lang="fr-FR"/>
               <a:t>Deuxième niveau</a:t>
             </a:r>
-            <a:endParaRPr lang="fr-FR"/>
           </a:p>
           <a:p>
             <a:pPr lvl="2"/>
@@ -2857,7 +2845,6 @@
               <a:rPr lang="fr-FR"/>
               <a:t>Troisième niveau</a:t>
             </a:r>
-            <a:endParaRPr lang="fr-FR"/>
           </a:p>
           <a:p>
             <a:pPr lvl="3"/>
@@ -2865,7 +2852,6 @@
               <a:rPr lang="fr-FR"/>
               <a:t>Quatrième niveau</a:t>
             </a:r>
-            <a:endParaRPr lang="fr-FR"/>
           </a:p>
           <a:p>
             <a:pPr lvl="4"/>
@@ -2914,6 +2900,7 @@
           <a:p>
             <a:fld id="{67F45AC6-C491-4585-A584-9CE2AF7D5500}" type="datetime1">
               <a:rPr lang="en-US" smtClean="0"/>
+              <a:t>4/14/2026</a:t>
             </a:fld>
             <a:endParaRPr lang="en-US"/>
           </a:p>
@@ -2995,6 +2982,7 @@
           <a:p>
             <a:fld id="{CC057153-B650-4DEB-B370-79DDCFDCE934}" type="slidenum">
               <a:rPr lang="en-US" smtClean="0"/>
+              <a:t>‹N°›</a:t>
             </a:fld>
             <a:endParaRPr lang="en-US"/>
           </a:p>
@@ -3427,7 +3415,7 @@
           <p:nvPr/>
         </p:nvPicPr>
         <p:blipFill>
-          <a:blip r:embed="rId1"/>
+          <a:blip r:embed="rId2"/>
           <a:srcRect t="6266" b="3373"/>
           <a:stretch>
             <a:fillRect/>
@@ -3501,14 +3489,14 @@
           <a:p>
             <a:pPr algn="l"/>
             <a:r>
-              <a:rPr lang="fr-FR" sz="2200" dirty="0"/>
+              <a:rPr lang="fr-FR" sz="2200" b="1" dirty="0"/>
               <a:t>Présenté par : Hamed </a:t>
             </a:r>
             <a:r>
-              <a:rPr lang="fr-FR" sz="2200" dirty="0" err="1"/>
+              <a:rPr lang="fr-FR" sz="2200" b="1" dirty="0" err="1"/>
               <a:t>Tlili</a:t>
             </a:r>
-            <a:endParaRPr lang="fr-FR" sz="2200" dirty="0"/>
+            <a:endParaRPr lang="fr-FR" sz="2200" b="1" dirty="0"/>
           </a:p>
           <a:p>
             <a:pPr algn="l"/>
@@ -3524,7 +3512,7 @@
         </p:nvSpPr>
         <p:spPr>
           <a:xfrm>
-            <a:off x="2997610" y="2956740"/>
+            <a:off x="2995162" y="3503587"/>
             <a:ext cx="6201696" cy="3139321"/>
           </a:xfrm>
           <a:prstGeom prst="rect">
@@ -3566,25 +3554,39 @@
               <a:rPr lang="fr-FR" dirty="0"/>
               <a:t>           </a:t>
             </a:r>
+          </a:p>
+          <a:p>
             <a:endParaRPr lang="fr-FR" dirty="0"/>
           </a:p>
           <a:p>
-            <a:endParaRPr lang="fr-FR" dirty="0"/>
-          </a:p>
-          <a:p>
-            <a:r>
-              <a:rPr lang="fr-FR" dirty="0"/>
-              <a:t>            Analyse Complète du </a:t>
-            </a:r>
-            <a:r>
-              <a:rPr lang="fr-FR" dirty="0" err="1"/>
+            <a:r>
+              <a:rPr lang="fr-FR" b="1" dirty="0"/>
+              <a:t>            </a:t>
+            </a:r>
+            <a:r>
+              <a:rPr lang="fr-FR" b="1" dirty="0">
+                <a:solidFill>
+                  <a:srgbClr val="92D050"/>
+                </a:solidFill>
+              </a:rPr>
+              <a:t>Analyse Complète du </a:t>
+            </a:r>
+            <a:r>
+              <a:rPr lang="fr-FR" b="1" dirty="0" err="1">
+                <a:solidFill>
+                  <a:srgbClr val="92D050"/>
+                </a:solidFill>
+              </a:rPr>
               <a:t>Churn</a:t>
             </a:r>
             <a:r>
-              <a:rPr lang="fr-FR" dirty="0"/>
+              <a:rPr lang="fr-FR" b="1" dirty="0">
+                <a:solidFill>
+                  <a:srgbClr val="92D050"/>
+                </a:solidFill>
+              </a:rPr>
               <a:t> Client</a:t>
             </a:r>
-            <a:endParaRPr lang="fr-FR" dirty="0"/>
           </a:p>
         </p:txBody>
       </p:sp>
@@ -3783,6 +3785,10 @@
             <a:br>
               <a:rPr lang="en-US" sz="2200" b="1"/>
             </a:br>
+            <a:r>
+              <a:rPr lang="en-US" sz="2200"/>
+              <a:t/>
+            </a:r>
             <a:br>
               <a:rPr lang="en-US" sz="2200"/>
             </a:br>
@@ -3888,7 +3894,6 @@
               <a:rPr lang="en-US" sz="1600" dirty="0"/>
               <a:t> :</a:t>
             </a:r>
-            <a:endParaRPr lang="en-US" sz="1600" dirty="0"/>
           </a:p>
           <a:p>
             <a:pPr defTabSz="914400">
@@ -3932,7 +3937,6 @@
               <a:rPr lang="en-US" sz="1600" dirty="0"/>
               <a:t> </a:t>
             </a:r>
-            <a:endParaRPr lang="en-US" sz="1600" dirty="0"/>
           </a:p>
           <a:p>
             <a:pPr defTabSz="914400">
@@ -3959,7 +3963,6 @@
               <a:rPr lang="en-US" sz="1600" dirty="0"/>
               <a:t> :</a:t>
             </a:r>
-            <a:endParaRPr lang="en-US" sz="1600" dirty="0"/>
           </a:p>
           <a:p>
             <a:pPr defTabSz="914400">
@@ -4034,7 +4037,6 @@
               <a:rPr lang="en-US" sz="1600" dirty="0"/>
               <a:t>.”</a:t>
             </a:r>
-            <a:endParaRPr lang="en-US" sz="1600" dirty="0"/>
           </a:p>
           <a:p>
             <a:pPr defTabSz="914400">
@@ -4061,7 +4063,6 @@
               <a:rPr lang="en-US" sz="1600" dirty="0"/>
               <a:t> :</a:t>
             </a:r>
-            <a:endParaRPr lang="en-US" sz="1600" dirty="0"/>
           </a:p>
           <a:p>
             <a:pPr defTabSz="914400">
@@ -4081,7 +4082,6 @@
               <a:rPr lang="en-US" sz="1600" dirty="0"/>
               <a:t>Si la part “Yes” est grande → </a:t>
             </a:r>
-            <a:endParaRPr lang="en-US" sz="1600" dirty="0"/>
           </a:p>
           <a:p>
             <a:pPr defTabSz="914400">
@@ -4105,7 +4105,6 @@
               <a:rPr lang="en-US" sz="1600" dirty="0"/>
               <a:t> </a:t>
             </a:r>
-            <a:endParaRPr lang="en-US" sz="1600" dirty="0"/>
           </a:p>
           <a:p>
             <a:pPr defTabSz="914400">
@@ -4133,7 +4132,6 @@
               <a:rPr lang="en-US" sz="1600" dirty="0"/>
               <a:t> est petite → situation stable</a:t>
             </a:r>
-            <a:endParaRPr lang="en-US" sz="1600" dirty="0"/>
           </a:p>
         </p:txBody>
       </p:sp>
@@ -4148,7 +4146,7 @@
           </p:nvPr>
         </p:nvPicPr>
         <p:blipFill>
-          <a:blip r:embed="rId1">
+          <a:blip r:embed="rId2">
             <a:extLst>
               <a:ext uri="{28A0092B-C50C-407E-A947-70E740481C1C}">
                 <a14:useLocalDpi xmlns:a14="http://schemas.microsoft.com/office/drawing/2010/main" val="0"/>
@@ -4195,42 +4193,93 @@
               <a:buNone/>
             </a:pPr>
             <a:r>
+              <a:rPr lang="en-US" dirty="0">
+                <a:solidFill>
+                  <a:srgbClr val="00B050"/>
+                </a:solidFill>
+              </a:rPr>
+              <a:t>SELECT </a:t>
+            </a:r>
+            <a:br>
+              <a:rPr lang="en-US" dirty="0">
+                <a:solidFill>
+                  <a:srgbClr val="00B050"/>
+                </a:solidFill>
+              </a:rPr>
+            </a:br>
+            <a:r>
+              <a:rPr lang="en-US" dirty="0">
+                <a:solidFill>
+                  <a:srgbClr val="00B050"/>
+                </a:solidFill>
+              </a:rPr>
+              <a:t>Churn,</a:t>
+            </a:r>
+            <a:br>
+              <a:rPr lang="en-US" dirty="0">
+                <a:solidFill>
+                  <a:srgbClr val="00B050"/>
+                </a:solidFill>
+              </a:rPr>
+            </a:br>
+            <a:r>
+              <a:rPr lang="en-US" dirty="0">
+                <a:solidFill>
+                  <a:srgbClr val="00B050"/>
+                </a:solidFill>
+              </a:rPr>
+              <a:t>COUNT(*) AS </a:t>
+            </a:r>
+            <a:r>
+              <a:rPr lang="en-US" dirty="0" err="1">
+                <a:solidFill>
+                  <a:srgbClr val="00B050"/>
+                </a:solidFill>
+              </a:rPr>
+              <a:t>TotalClients</a:t>
+            </a:r>
+            <a:r>
+              <a:rPr lang="en-US" dirty="0">
+                <a:solidFill>
+                  <a:srgbClr val="00B050"/>
+                </a:solidFill>
+              </a:rPr>
+              <a:t/>
+            </a:r>
+            <a:br>
+              <a:rPr lang="en-US" dirty="0">
+                <a:solidFill>
+                  <a:srgbClr val="00B050"/>
+                </a:solidFill>
+              </a:rPr>
+            </a:br>
+            <a:r>
+              <a:rPr lang="en-US" dirty="0">
+                <a:solidFill>
+                  <a:srgbClr val="00B050"/>
+                </a:solidFill>
+              </a:rPr>
+              <a:t>FROM Telco</a:t>
+            </a:r>
+            <a:br>
+              <a:rPr lang="en-US" dirty="0">
+                <a:solidFill>
+                  <a:srgbClr val="00B050"/>
+                </a:solidFill>
+              </a:rPr>
+            </a:br>
+            <a:r>
+              <a:rPr lang="en-US" dirty="0">
+                <a:solidFill>
+                  <a:srgbClr val="00B050"/>
+                </a:solidFill>
+              </a:rPr>
+              <a:t>GROUP BY Churn</a:t>
+            </a:r>
+            <a:r>
               <a:rPr lang="en-US" dirty="0"/>
-              <a:t>SELECT </a:t>
-            </a:r>
-            <a:br>
-              <a:rPr lang="en-US" dirty="0"/>
-            </a:br>
-            <a:r>
-              <a:rPr lang="en-US" dirty="0"/>
-              <a:t>Churn,</a:t>
-            </a:r>
-            <a:br>
-              <a:rPr lang="en-US" dirty="0"/>
-            </a:br>
-            <a:r>
-              <a:rPr lang="en-US" dirty="0"/>
-              <a:t>COUNT(*) AS </a:t>
-            </a:r>
-            <a:r>
-              <a:rPr lang="en-US" dirty="0" err="1"/>
-              <a:t>TotalClients</a:t>
-            </a:r>
-            <a:br>
-              <a:rPr lang="en-US" dirty="0"/>
-            </a:br>
-            <a:r>
-              <a:rPr lang="en-US" dirty="0"/>
-              <a:t>FROM Telco</a:t>
-            </a:r>
-            <a:br>
-              <a:rPr lang="en-US" dirty="0"/>
-            </a:br>
-            <a:r>
-              <a:rPr lang="en-US" dirty="0"/>
-              <a:t>GROUP BY Churn;</a:t>
-            </a:r>
-            <a:endParaRPr lang="en-US" dirty="0"/>
+              <a:t>;</a:t>
+            </a:r>
           </a:p>
         </p:txBody>
       </p:sp>
@@ -4260,7 +4309,6 @@
               <a:rPr lang="fr-FR" b="1" dirty="0"/>
               <a:t>Ce diagramme circulaire montre la proportion des clients qui quittent le service. On observe qu’une part importante de clients quitte l’entreprise, ce qui représente un risque important.</a:t>
             </a:r>
-            <a:endParaRPr lang="fr-FR" b="1" dirty="0"/>
           </a:p>
         </p:txBody>
       </p:sp>
@@ -4323,7 +4371,6 @@
               <a:rPr lang="fr-FR" sz="3700"/>
               <a:t>Diagramme : Charges vs Churn</a:t>
             </a:r>
-            <a:endParaRPr lang="fr-FR" sz="3700"/>
           </a:p>
         </p:txBody>
       </p:sp>
@@ -4390,7 +4437,6 @@
               <a:rPr lang="fr-FR" sz="1600" dirty="0"/>
               <a:t> Ce que tu vois : 2 barres : clients partis clients restés  Comment expliquer : “Les clients qui quittent ont en moyenne des charges mensuelles plus élevées.”  Interprétation : Prix élevé = clients partent </a:t>
             </a:r>
-            <a:endParaRPr lang="fr-FR" sz="1600" dirty="0"/>
           </a:p>
         </p:txBody>
       </p:sp>
@@ -4403,7 +4449,7 @@
           <p:nvPr/>
         </p:nvPicPr>
         <p:blipFill>
-          <a:blip r:embed="rId1">
+          <a:blip r:embed="rId2">
             <a:extLst>
               <a:ext uri="{28A0092B-C50C-407E-A947-70E740481C1C}">
                 <a14:useLocalDpi xmlns:a14="http://schemas.microsoft.com/office/drawing/2010/main" val="0"/>
@@ -4447,50 +4493,110 @@
           <a:lstStyle/>
           <a:p>
             <a:r>
-              <a:rPr lang="en-US" dirty="0"/>
+              <a:rPr lang="en-US" dirty="0">
+                <a:solidFill>
+                  <a:srgbClr val="00B050"/>
+                </a:solidFill>
+              </a:rPr>
               <a:t>SELECT </a:t>
             </a:r>
             <a:br>
-              <a:rPr lang="en-US" dirty="0"/>
+              <a:rPr lang="en-US" dirty="0">
+                <a:solidFill>
+                  <a:srgbClr val="00B050"/>
+                </a:solidFill>
+              </a:rPr>
             </a:br>
             <a:r>
-              <a:rPr lang="en-US" dirty="0"/>
+              <a:rPr lang="en-US" dirty="0">
+                <a:solidFill>
+                  <a:srgbClr val="00B050"/>
+                </a:solidFill>
+              </a:rPr>
               <a:t>Churn,</a:t>
             </a:r>
             <a:br>
-              <a:rPr lang="en-US" dirty="0"/>
+              <a:rPr lang="en-US" dirty="0">
+                <a:solidFill>
+                  <a:srgbClr val="00B050"/>
+                </a:solidFill>
+              </a:rPr>
             </a:br>
             <a:r>
-              <a:rPr lang="en-US" dirty="0"/>
+              <a:rPr lang="en-US" dirty="0">
+                <a:solidFill>
+                  <a:srgbClr val="00B050"/>
+                </a:solidFill>
+              </a:rPr>
               <a:t>AVG(CAST(</a:t>
             </a:r>
             <a:r>
-              <a:rPr lang="en-US" dirty="0" err="1"/>
+              <a:rPr lang="en-US" dirty="0" err="1">
+                <a:solidFill>
+                  <a:srgbClr val="00B050"/>
+                </a:solidFill>
+              </a:rPr>
               <a:t>MonthlyCharges</a:t>
             </a:r>
             <a:r>
-              <a:rPr lang="en-US" dirty="0"/>
+              <a:rPr lang="en-US" dirty="0">
+                <a:solidFill>
+                  <a:srgbClr val="00B050"/>
+                </a:solidFill>
+              </a:rPr>
               <a:t> AS FLOAT)) AS </a:t>
             </a:r>
             <a:r>
-              <a:rPr lang="en-US" dirty="0" err="1"/>
+              <a:rPr lang="en-US" dirty="0" err="1">
+                <a:solidFill>
+                  <a:srgbClr val="00B050"/>
+                </a:solidFill>
+              </a:rPr>
               <a:t>AvgMonthlyCharges</a:t>
             </a:r>
+            <a:r>
+              <a:rPr lang="en-US" dirty="0">
+                <a:solidFill>
+                  <a:srgbClr val="00B050"/>
+                </a:solidFill>
+              </a:rPr>
+              <a:t/>
+            </a:r>
             <a:br>
-              <a:rPr lang="en-US" dirty="0"/>
+              <a:rPr lang="en-US" dirty="0">
+                <a:solidFill>
+                  <a:srgbClr val="00B050"/>
+                </a:solidFill>
+              </a:rPr>
             </a:br>
             <a:r>
-              <a:rPr lang="en-US" dirty="0"/>
+              <a:rPr lang="en-US" dirty="0">
+                <a:solidFill>
+                  <a:srgbClr val="00B050"/>
+                </a:solidFill>
+              </a:rPr>
               <a:t>FROM Telco</a:t>
             </a:r>
             <a:br>
-              <a:rPr lang="en-US" dirty="0"/>
+              <a:rPr lang="en-US" dirty="0">
+                <a:solidFill>
+                  <a:srgbClr val="00B050"/>
+                </a:solidFill>
+              </a:rPr>
             </a:br>
             <a:r>
-              <a:rPr lang="en-US" dirty="0"/>
+              <a:rPr lang="en-US" dirty="0">
+                <a:solidFill>
+                  <a:srgbClr val="00B050"/>
+                </a:solidFill>
+              </a:rPr>
               <a:t>GROUP BY Churn;</a:t>
             </a:r>
-            <a:endParaRPr lang="fr-FR" dirty="0"/>
+            <a:endParaRPr lang="fr-FR" dirty="0">
+              <a:solidFill>
+                <a:srgbClr val="00B050"/>
+              </a:solidFill>
+            </a:endParaRPr>
           </a:p>
         </p:txBody>
       </p:sp>
@@ -4528,7 +4634,6 @@
               <a:rPr lang="fr-FR" b="1" dirty="0"/>
               <a:t>.</a:t>
             </a:r>
-            <a:endParaRPr lang="fr-FR" b="1" dirty="0"/>
           </a:p>
         </p:txBody>
       </p:sp>
@@ -4591,7 +4696,6 @@
               <a:rPr lang="fr-FR" sz="4000"/>
               <a:t>Diagramme : Type de Contrat</a:t>
             </a:r>
-            <a:endParaRPr lang="fr-FR" sz="4000"/>
           </a:p>
         </p:txBody>
       </p:sp>
@@ -4690,21 +4794,37 @@
               <a:rPr lang="fr-FR" sz="1600" dirty="0"/>
               <a:t>  Comment expliquer : “Les clients avec contrat mensuel quittent beaucoup plus que ceux avec contrat à long terme.”  </a:t>
             </a:r>
-            <a:endParaRPr lang="fr-FR" sz="1600" dirty="0"/>
           </a:p>
           <a:p>
             <a:r>
               <a:rPr lang="fr-FR" sz="1600" dirty="0"/>
-              <a:t>Interprétation : contrat court=instabilité</a:t>
-            </a:r>
-            <a:endParaRPr lang="fr-FR" sz="1600" dirty="0"/>
-          </a:p>
-          <a:p>
+              <a:t>Interprétation </a:t>
+            </a:r>
+            <a:r>
+              <a:rPr lang="fr-FR" sz="1600"/>
+              <a:t>: </a:t>
+            </a:r>
+            <a:endParaRPr lang="fr-FR" sz="1600" smtClean="0"/>
+          </a:p>
+          <a:p>
+            <a:r>
+              <a:rPr lang="fr-FR" sz="1600" smtClean="0"/>
+              <a:t>contrat </a:t>
+            </a:r>
             <a:r>
               <a:rPr lang="fr-FR" sz="1600" dirty="0"/>
-              <a:t>                      contrat long = fidélité </a:t>
-            </a:r>
-            <a:endParaRPr lang="fr-FR" sz="1600" dirty="0"/>
+              <a:t>court=instabilité</a:t>
+            </a:r>
+          </a:p>
+          <a:p>
+            <a:r>
+              <a:rPr lang="fr-FR" sz="1600" smtClean="0"/>
+              <a:t>contrat </a:t>
+            </a:r>
+            <a:r>
+              <a:rPr lang="fr-FR" sz="1600" dirty="0"/>
+              <a:t>long = fidélité </a:t>
+            </a:r>
           </a:p>
         </p:txBody>
       </p:sp>
@@ -4717,7 +4837,7 @@
           <p:nvPr/>
         </p:nvPicPr>
         <p:blipFill>
-          <a:blip r:embed="rId1">
+          <a:blip r:embed="rId2">
             <a:extLst>
               <a:ext uri="{28A0092B-C50C-407E-A947-70E740481C1C}">
                 <a14:useLocalDpi xmlns:a14="http://schemas.microsoft.com/office/drawing/2010/main" val="0"/>
@@ -4761,46 +4881,94 @@
           <a:lstStyle/>
           <a:p>
             <a:r>
-              <a:rPr lang="en-US" dirty="0"/>
+              <a:rPr lang="en-US" dirty="0">
+                <a:solidFill>
+                  <a:srgbClr val="00B050"/>
+                </a:solidFill>
+              </a:rPr>
               <a:t>SELECT </a:t>
             </a:r>
             <a:br>
-              <a:rPr lang="en-US" dirty="0"/>
+              <a:rPr lang="en-US" dirty="0">
+                <a:solidFill>
+                  <a:srgbClr val="00B050"/>
+                </a:solidFill>
+              </a:rPr>
             </a:br>
             <a:r>
-              <a:rPr lang="en-US" dirty="0"/>
+              <a:rPr lang="en-US" dirty="0">
+                <a:solidFill>
+                  <a:srgbClr val="00B050"/>
+                </a:solidFill>
+              </a:rPr>
               <a:t>Contract,</a:t>
             </a:r>
             <a:br>
-              <a:rPr lang="en-US" dirty="0"/>
+              <a:rPr lang="en-US" dirty="0">
+                <a:solidFill>
+                  <a:srgbClr val="00B050"/>
+                </a:solidFill>
+              </a:rPr>
             </a:br>
             <a:r>
-              <a:rPr lang="en-US" dirty="0"/>
+              <a:rPr lang="en-US" dirty="0">
+                <a:solidFill>
+                  <a:srgbClr val="00B050"/>
+                </a:solidFill>
+              </a:rPr>
               <a:t>Churn,</a:t>
             </a:r>
             <a:br>
-              <a:rPr lang="en-US" dirty="0"/>
+              <a:rPr lang="en-US" dirty="0">
+                <a:solidFill>
+                  <a:srgbClr val="00B050"/>
+                </a:solidFill>
+              </a:rPr>
             </a:br>
             <a:r>
-              <a:rPr lang="en-US" dirty="0"/>
+              <a:rPr lang="en-US" dirty="0">
+                <a:solidFill>
+                  <a:srgbClr val="00B050"/>
+                </a:solidFill>
+              </a:rPr>
               <a:t>COUNT(*) AS Total</a:t>
             </a:r>
             <a:br>
-              <a:rPr lang="en-US" dirty="0"/>
+              <a:rPr lang="en-US" dirty="0">
+                <a:solidFill>
+                  <a:srgbClr val="00B050"/>
+                </a:solidFill>
+              </a:rPr>
             </a:br>
             <a:r>
-              <a:rPr lang="en-US" dirty="0"/>
+              <a:rPr lang="en-US" dirty="0">
+                <a:solidFill>
+                  <a:srgbClr val="00B050"/>
+                </a:solidFill>
+              </a:rPr>
               <a:t>FROM Telco</a:t>
             </a:r>
             <a:br>
-              <a:rPr lang="en-US" dirty="0"/>
+              <a:rPr lang="en-US" dirty="0">
+                <a:solidFill>
+                  <a:srgbClr val="00B050"/>
+                </a:solidFill>
+              </a:rPr>
             </a:br>
             <a:r>
-              <a:rPr lang="en-US" dirty="0"/>
+              <a:rPr lang="en-US" dirty="0">
+                <a:solidFill>
+                  <a:srgbClr val="00B050"/>
+                </a:solidFill>
+              </a:rPr>
               <a:t>GROUP BY Contract, Churn</a:t>
             </a:r>
             <a:br>
-              <a:rPr lang="en-US" dirty="0"/>
+              <a:rPr lang="en-US" dirty="0">
+                <a:solidFill>
+                  <a:srgbClr val="00B050"/>
+                </a:solidFill>
+              </a:rPr>
             </a:br>
             <a:r>
               <a:rPr lang="en-US" dirty="0"/>
@@ -4836,7 +5004,6 @@
               <a:rPr lang="fr-FR" b="1" dirty="0"/>
               <a:t>Ce graphique montre que les clients avec des contrats mensuels quittent plus souvent que ceux avec des contrats à long terme. Cela indique que la durée du contrat influence la fidélité.</a:t>
             </a:r>
-            <a:endParaRPr lang="fr-FR" b="1" dirty="0"/>
           </a:p>
         </p:txBody>
       </p:sp>
@@ -4899,7 +5066,6 @@
               <a:rPr lang="fr-FR" dirty="0"/>
               <a:t>Interprétation</a:t>
             </a:r>
-            <a:endParaRPr lang="fr-FR" dirty="0"/>
           </a:p>
         </p:txBody>
       </p:sp>
@@ -4974,7 +5140,6 @@
               <a:rPr lang="fr-FR" dirty="0"/>
               <a:t>. Ces éléments sont les principaux facteurs à surveiller.</a:t>
             </a:r>
-            <a:endParaRPr lang="fr-FR" dirty="0"/>
           </a:p>
         </p:txBody>
       </p:sp>
@@ -4987,7 +5152,7 @@
           <p:nvPr/>
         </p:nvPicPr>
         <p:blipFill>
-          <a:blip r:embed="rId1"/>
+          <a:blip r:embed="rId2"/>
           <a:srcRect r="61775" b="-445"/>
           <a:stretch>
             <a:fillRect/>
@@ -5111,11 +5276,6 @@
               </a:rPr>
               <a:t>, l’entreprise doit améliorer la satisfaction client, proposer des offres promotionnelles et encourager les contrats long terme</a:t>
             </a:r>
-            <a:endParaRPr lang="fr-FR" sz="2400" b="1" dirty="0">
-              <a:solidFill>
-                <a:srgbClr val="00B050"/>
-              </a:solidFill>
-            </a:endParaRPr>
           </a:p>
         </p:txBody>
       </p:sp>
@@ -5178,6 +5338,10 @@
               <a:rPr lang="fr-FR" sz="3500" b="1"/>
               <a:t>Introduction</a:t>
             </a:r>
+            <a:r>
+              <a:rPr lang="fr-FR" sz="3500"/>
+              <a:t/>
+            </a:r>
             <a:br>
               <a:rPr lang="fr-FR" sz="3500"/>
             </a:br>
@@ -5211,7 +5375,6 @@
               <a:rPr lang="fr-FR" b="1"/>
               <a:t>Le churn représente les clients qui quittent un service. Ce phénomène constitue un enjeu majeur pour les entreprises, car il impacte directement leurs revenus et leur croissance. Dans ce projet, nous analysons les causes du churn afin de proposer des solutions efficaces.</a:t>
             </a:r>
-            <a:endParaRPr lang="fr-FR" b="1"/>
           </a:p>
         </p:txBody>
       </p:sp>
@@ -5274,7 +5437,6 @@
               <a:rPr lang="fr-FR" dirty="0"/>
               <a:t>Objectif du Projet</a:t>
             </a:r>
-            <a:endParaRPr lang="fr-FR" dirty="0"/>
           </a:p>
         </p:txBody>
       </p:sp>
@@ -5349,7 +5511,6 @@
               <a:rPr lang="fr-FR" b="1" dirty="0"/>
               <a:t>. Cette analyse permet à l’entreprise de prendre des décisions stratégiques basées sur les données.</a:t>
             </a:r>
-            <a:endParaRPr lang="fr-FR" b="1" dirty="0"/>
           </a:p>
         </p:txBody>
       </p:sp>
@@ -5362,7 +5523,7 @@
           <p:nvPr/>
         </p:nvPicPr>
         <p:blipFill>
-          <a:blip r:embed="rId1"/>
+          <a:blip r:embed="rId2"/>
           <a:srcRect l="12138" r="42702" b="-1"/>
           <a:stretch>
             <a:fillRect/>
@@ -5468,7 +5629,7 @@
           <p:nvPr/>
         </p:nvPicPr>
         <p:blipFill>
-          <a:blip r:embed="rId1">
+          <a:blip r:embed="rId2">
             <a:alphaModFix amt="40000"/>
           </a:blip>
           <a:srcRect t="6972" b="8758"/>
@@ -5516,11 +5677,6 @@
               </a:rPr>
               <a:t>Description du Dataset</a:t>
             </a:r>
-            <a:endParaRPr lang="fr-FR">
-              <a:solidFill>
-                <a:srgbClr val="FFFFFF"/>
-              </a:solidFill>
-            </a:endParaRPr>
           </a:p>
         </p:txBody>
       </p:sp>
@@ -5611,7 +5767,6 @@
               <a:rPr lang="fr-FR" b="1" dirty="0"/>
               <a:t>”. Il contient plus de 7000 clients avec des informations comme les charges mensuelles, la durée d’abonnement et le type de contrat. Ces données permettent d’étudier le comportement des clients.</a:t>
             </a:r>
-            <a:endParaRPr lang="fr-FR" b="1" dirty="0"/>
           </a:p>
         </p:txBody>
       </p:sp>
@@ -5624,7 +5779,7 @@
           <p:nvPr/>
         </p:nvPicPr>
         <p:blipFill>
-          <a:blip r:embed="rId2"/>
+          <a:blip r:embed="rId3"/>
           <a:stretch>
             <a:fillRect/>
           </a:stretch>
@@ -5679,7 +5834,14 @@
           <a:bodyPr/>
           <a:lstStyle/>
           <a:p>
-            <a:endParaRPr lang="fr-FR"/>
+            <a:r>
+              <a:rPr lang="fr-FR" dirty="0" smtClean="0"/>
+              <a:t/>
+            </a:r>
+            <a:br>
+              <a:rPr lang="fr-FR" dirty="0" smtClean="0"/>
+            </a:br>
+            <a:endParaRPr lang="fr-FR" dirty="0"/>
           </a:p>
         </p:txBody>
       </p:sp>
@@ -5738,10 +5900,11 @@
             <a:endParaRPr lang="fr-FR" dirty="0"/>
           </a:p>
           <a:p>
-            <a:r>
-              <a:rPr lang="fr-FR" dirty="0"/>
-              <a:t>le </a:t>
-            </a:r>
+            <a:pPr lvl="0">
+              <a:buClr>
+                <a:srgbClr val="B2B2B2"/>
+              </a:buClr>
+            </a:pPr>
             <a:endParaRPr lang="fr-FR" dirty="0"/>
           </a:p>
         </p:txBody>
@@ -5755,7 +5918,7 @@
           <p:nvPr/>
         </p:nvPicPr>
         <p:blipFill>
-          <a:blip r:embed="rId1">
+          <a:blip r:embed="rId2">
             <a:extLst>
               <a:ext uri="{28A0092B-C50C-407E-A947-70E740481C1C}">
                 <a14:useLocalDpi xmlns:a14="http://schemas.microsoft.com/office/drawing/2010/main" val="0"/>
@@ -5768,8 +5931,8 @@
         </p:blipFill>
         <p:spPr>
           <a:xfrm>
-            <a:off x="0" y="1569720"/>
-            <a:ext cx="12192000" cy="5236361"/>
+            <a:off x="0" y="2084832"/>
+            <a:ext cx="12192000" cy="4721249"/>
           </a:xfrm>
           <a:prstGeom prst="rect">
             <a:avLst/>
@@ -5883,7 +6046,6 @@
               <a:rPr lang="fr-FR" sz="4400"/>
               <a:t>Outils Utilisés</a:t>
             </a:r>
-            <a:endParaRPr lang="fr-FR" sz="4400"/>
           </a:p>
         </p:txBody>
       </p:sp>
@@ -5942,7 +6104,7 @@
         </p:spPr>
         <p:txBody>
           <a:bodyPr>
-            <a:normAutofit/>
+            <a:normAutofit fontScale="92500" lnSpcReduction="10000"/>
           </a:bodyPr>
           <a:lstStyle/>
           <a:p>
@@ -5950,12 +6112,23 @@
               <a:rPr lang="fr-FR" sz="1800" dirty="0"/>
               <a:t>Pour réaliser ce projet, nous avons utilisé SQL Server pour gérer la base de données, SSMS pour exécuter les requêtes, Visual Studio Code pour le développement et GitHub pour le versioning du projet. </a:t>
             </a:r>
-            <a:endParaRPr lang="fr-FR" sz="1800" dirty="0"/>
           </a:p>
           <a:p>
             <a:r>
               <a:rPr lang="fr-FR" sz="1800" dirty="0"/>
-              <a:t>1 SQL: il faut </a:t>
+              <a:t>1 SQL</a:t>
+            </a:r>
+            <a:r>
+              <a:rPr lang="fr-FR" sz="1800"/>
+              <a:t>: </a:t>
+            </a:r>
+            <a:r>
+              <a:rPr lang="fr-FR" sz="1800" smtClean="0"/>
+              <a:t>-il </a:t>
+            </a:r>
+            <a:r>
+              <a:rPr lang="fr-FR" sz="1800" dirty="0"/>
+              <a:t>faut </a:t>
             </a:r>
             <a:r>
               <a:rPr lang="fr-FR" sz="1800" dirty="0" err="1"/>
@@ -5971,15 +6144,69 @@
             </a:r>
             <a:r>
               <a:rPr lang="fr-FR" sz="1800" dirty="0"/>
-              <a:t> server et créer une base de donner et ouvrir le csv </a:t>
+              <a:t> server et créer une base de donner et ouvrir le </a:t>
+            </a:r>
+            <a:r>
+              <a:rPr lang="fr-FR" sz="1800"/>
+              <a:t>csv </a:t>
+            </a:r>
+            <a:endParaRPr lang="fr-FR" sz="1800"/>
+          </a:p>
+          <a:p>
+            <a:r>
+              <a:rPr lang="fr-FR" sz="1800" smtClean="0"/>
+              <a:t>         - </a:t>
+            </a:r>
+            <a:r>
+              <a:rPr lang="fr-FR" sz="1800"/>
+              <a:t>Le </a:t>
+            </a:r>
+            <a:r>
+              <a:rPr lang="fr-FR" sz="1800" b="1"/>
+              <a:t>data cleaning en SQL</a:t>
+            </a:r>
+            <a:r>
+              <a:rPr lang="fr-FR" sz="1800"/>
+              <a:t> (nettoyage des données) consiste à rendre tes données </a:t>
+            </a:r>
+            <a:r>
+              <a:rPr lang="fr-FR" sz="1800" b="1"/>
+              <a:t>propres, cohérentes et exploitables</a:t>
+            </a:r>
+            <a:r>
+              <a:rPr lang="fr-FR" sz="1800"/>
+              <a:t> </a:t>
+            </a:r>
+            <a:r>
+              <a:rPr lang="fr-FR" sz="1800"/>
+              <a:t>avant </a:t>
+            </a:r>
+            <a:r>
+              <a:rPr lang="fr-FR" sz="1800" smtClean="0"/>
+              <a:t>l’analyse</a:t>
             </a:r>
             <a:endParaRPr lang="fr-FR" sz="1800" dirty="0"/>
           </a:p>
           <a:p>
             <a:r>
               <a:rPr lang="fr-FR" sz="1800" dirty="0"/>
-              <a:t>2 VSC :</a:t>
-            </a:r>
+              <a:t>2 </a:t>
+            </a:r>
+            <a:r>
+              <a:rPr lang="fr-FR" sz="1800"/>
+              <a:t>VSC </a:t>
+            </a:r>
+            <a:r>
+              <a:rPr lang="fr-FR" sz="1800" smtClean="0"/>
+              <a:t>: </a:t>
+            </a:r>
+            <a:r>
+              <a:rPr lang="fr-FR" sz="1800" b="1"/>
+              <a:t>Dans ce projet, nous avons utilisé Visual Studio Code pour le développement des requêtes SQL, ainsi que Git et GitHub pour assurer le suivi, la collaboration et la gestion des versions du code.</a:t>
+            </a:r>
+            <a:endParaRPr lang="fr-FR" sz="1800"/>
+          </a:p>
+          <a:p>
             <a:endParaRPr lang="fr-FR" sz="1800" dirty="0"/>
           </a:p>
           <a:p>
@@ -5996,7 +6223,7 @@
           <p:nvPr/>
         </p:nvPicPr>
         <p:blipFill>
-          <a:blip r:embed="rId1">
+          <a:blip r:embed="rId2">
             <a:extLst>
               <a:ext uri="{28A0092B-C50C-407E-A947-70E740481C1C}">
                 <a14:useLocalDpi xmlns:a14="http://schemas.microsoft.com/office/drawing/2010/main" val="0"/>
@@ -6027,7 +6254,7 @@
           <p:nvPr/>
         </p:nvPicPr>
         <p:blipFill>
-          <a:blip r:embed="rId2">
+          <a:blip r:embed="rId3" cstate="print">
             <a:extLst>
               <a:ext uri="{28A0092B-C50C-407E-A947-70E740481C1C}">
                 <a14:useLocalDpi xmlns:a14="http://schemas.microsoft.com/office/drawing/2010/main" val="0"/>
@@ -6104,8 +6331,8 @@
           <a:lstStyle/>
           <a:p>
             <a:r>
-              <a:rPr lang="fr-FR" sz="4800"/>
-              <a:t>GUITHUB :</a:t>
+              <a:rPr lang="fr-FR" sz="4800" smtClean="0"/>
+              <a:t>3 GUITHUB :</a:t>
             </a:r>
             <a:endParaRPr lang="fr-FR" sz="4800"/>
           </a:p>
@@ -6171,10 +6398,33 @@
           <a:lstStyle/>
           <a:p>
             <a:r>
-              <a:rPr lang="en-US" sz="2000"/>
-              <a:t>Quelque exemple doperation ,</a:t>
-            </a:r>
-            <a:endParaRPr lang="en-US" sz="2000"/>
+              <a:rPr lang="en-US" sz="2000" dirty="0" err="1" smtClean="0"/>
+              <a:t>Quelques</a:t>
+            </a:r>
+            <a:r>
+              <a:rPr lang="en-US" sz="2000" dirty="0" smtClean="0"/>
+              <a:t> </a:t>
+            </a:r>
+            <a:r>
+              <a:rPr lang="en-US" sz="2000" dirty="0" err="1" smtClean="0"/>
+              <a:t>exemples</a:t>
+            </a:r>
+            <a:r>
+              <a:rPr lang="en-US" sz="2000" dirty="0" smtClean="0"/>
+              <a:t> </a:t>
+            </a:r>
+            <a:r>
+              <a:rPr lang="en-US" sz="2000" dirty="0" err="1" smtClean="0"/>
+              <a:t>d’operations</a:t>
+            </a:r>
+            <a:r>
+              <a:rPr lang="en-US" sz="2000" dirty="0" smtClean="0"/>
+              <a:t> </a:t>
+            </a:r>
+            <a:r>
+              <a:rPr lang="en-US" sz="2000" dirty="0"/>
+              <a:t>,</a:t>
+            </a:r>
           </a:p>
         </p:txBody>
       </p:sp>
@@ -6283,7 +6533,7 @@
           <p:nvPr/>
         </p:nvPicPr>
         <p:blipFill>
-          <a:blip r:embed="rId1">
+          <a:blip r:embed="rId2">
             <a:extLst>
               <a:ext uri="{28A0092B-C50C-407E-A947-70E740481C1C}">
                 <a14:useLocalDpi xmlns:a14="http://schemas.microsoft.com/office/drawing/2010/main" val="0"/>
@@ -6414,7 +6664,7 @@
           <p:nvPr/>
         </p:nvPicPr>
         <p:blipFill>
-          <a:blip r:embed="rId2">
+          <a:blip r:embed="rId3" cstate="print">
             <a:extLst>
               <a:ext uri="{28A0092B-C50C-407E-A947-70E740481C1C}">
                 <a14:useLocalDpi xmlns:a14="http://schemas.microsoft.com/office/drawing/2010/main" val="0"/>
@@ -6543,7 +6793,7 @@
           <p:nvPr/>
         </p:nvPicPr>
         <p:blipFill>
-          <a:blip r:embed="rId3"/>
+          <a:blip r:embed="rId4"/>
           <a:srcRect l="7640" r="-1" b="-1"/>
           <a:stretch>
             <a:fillRect/>
@@ -6618,7 +6868,6 @@
               <a:rPr lang="fr-FR" dirty="0"/>
               <a:t>Base de Données</a:t>
             </a:r>
-            <a:endParaRPr lang="fr-FR" dirty="0"/>
           </a:p>
         </p:txBody>
       </p:sp>
@@ -6725,7 +6974,6 @@
               <a:rPr lang="fr-FR" dirty="0"/>
               <a:t>. Cette structure simple facilite l’analyse.</a:t>
             </a:r>
-            <a:endParaRPr lang="fr-FR" dirty="0"/>
           </a:p>
         </p:txBody>
       </p:sp>
@@ -6738,7 +6986,7 @@
           <p:nvPr/>
         </p:nvPicPr>
         <p:blipFill>
-          <a:blip r:embed="rId1">
+          <a:blip r:embed="rId2">
             <a:extLst>
               <a:ext uri="{28A0092B-C50C-407E-A947-70E740481C1C}">
                 <a14:useLocalDpi xmlns:a14="http://schemas.microsoft.com/office/drawing/2010/main" val="0"/>
@@ -6818,7 +7066,6 @@
               <a:rPr lang="fr-FR" dirty="0"/>
               <a:t>Analyse SQL</a:t>
             </a:r>
-            <a:endParaRPr lang="fr-FR" dirty="0"/>
           </a:p>
         </p:txBody>
       </p:sp>
@@ -6868,13 +7115,13 @@
           <p:nvPr/>
         </p:nvPicPr>
         <p:blipFill>
-          <a:blip r:embed="rId1">
+          <a:blip r:embed="rId2">
             <a:extLst>
               <a:ext uri="{28A0092B-C50C-407E-A947-70E740481C1C}">
                 <a14:useLocalDpi xmlns:a14="http://schemas.microsoft.com/office/drawing/2010/main" val="0"/>
               </a:ext>
               <a:ext uri="{96DAC541-7B7A-43D3-8B79-37D633B846F1}">
-                <asvg:svgBlip xmlns:asvg="http://schemas.microsoft.com/office/drawing/2016/SVG/main" r:embed="rId2"/>
+                <asvg:svgBlip xmlns="" xmlns:asvg="http://schemas.microsoft.com/office/drawing/2016/SVG/main" r:embed="rId3"/>
               </a:ext>
             </a:extLst>
           </a:blip>
@@ -7199,6 +7446,8 @@
       </a:bgFillStyleLst>
     </a:fmtScheme>
   </a:themeElements>
+  <a:objectDefaults/>
+  <a:extraClrSchemeLst/>
   <a:extLst>
     <a:ext uri="{05A4C25C-085E-4340-85A3-A5531E510DB2}">
       <thm15:themeFamily xmlns:thm15="http://schemas.microsoft.com/office/thememl/2012/main" name="Office Theme" id="{62F939B6-93AF-4DB8-9C6B-D6C7DFDC589F}" vid="{4A3C46E8-61CC-4603-A589-7422A47A8E4A}"/>
